--- a/docs/notes/Защита ДП/DVD-R/Презентация ДП.pptx
+++ b/docs/notes/Защита ДП/DVD-R/Презентация ДП.pptx
@@ -15,26 +15,6 @@
   </p:sldIdLst>
   <p:sldSz cx="18288000" cy="10287000"/>
   <p:notesSz cx="6858000" cy="9144000"/>
-  <p:embeddedFontLst>
-    <p:embeddedFont>
-      <p:font typeface="Open Sans" panose="020B0604020202020204" charset="0"/>
-      <p:regular r:id="rId9"/>
-      <p:bold r:id="rId10"/>
-      <p:italic r:id="rId11"/>
-      <p:boldItalic r:id="rId12"/>
-    </p:embeddedFont>
-    <p:embeddedFont>
-      <p:font typeface="Calibri" panose="020F0502020204030204" pitchFamily="34" charset="0"/>
-      <p:regular r:id="rId13"/>
-      <p:bold r:id="rId14"/>
-      <p:italic r:id="rId15"/>
-      <p:boldItalic r:id="rId16"/>
-    </p:embeddedFont>
-    <p:embeddedFont>
-      <p:font typeface="League Spartan" panose="020B0604020202020204" charset="0"/>
-      <p:regular r:id="rId17"/>
-    </p:embeddedFont>
-  </p:embeddedFontLst>
   <p:defaultTextStyle>
     <a:defPPr>
       <a:defRPr lang="en-US"/>
@@ -341,7 +321,7 @@
             <a:fld id="{1D8BD707-D9CF-40AE-B4C6-C98DA3205C09}" type="datetimeFigureOut">
               <a:rPr lang="en-US" smtClean="0"/>
               <a:pPr/>
-              <a:t>4/19/2026</a:t>
+              <a:t>4/22/2026</a:t>
             </a:fld>
             <a:endParaRPr lang="en-US"/>
           </a:p>
@@ -506,7 +486,7 @@
             <a:fld id="{1D8BD707-D9CF-40AE-B4C6-C98DA3205C09}" type="datetimeFigureOut">
               <a:rPr lang="en-US" smtClean="0"/>
               <a:pPr/>
-              <a:t>4/19/2026</a:t>
+              <a:t>4/22/2026</a:t>
             </a:fld>
             <a:endParaRPr lang="en-US"/>
           </a:p>
@@ -681,7 +661,7 @@
             <a:fld id="{1D8BD707-D9CF-40AE-B4C6-C98DA3205C09}" type="datetimeFigureOut">
               <a:rPr lang="en-US" smtClean="0"/>
               <a:pPr/>
-              <a:t>4/19/2026</a:t>
+              <a:t>4/22/2026</a:t>
             </a:fld>
             <a:endParaRPr lang="en-US"/>
           </a:p>
@@ -846,7 +826,7 @@
             <a:fld id="{1D8BD707-D9CF-40AE-B4C6-C98DA3205C09}" type="datetimeFigureOut">
               <a:rPr lang="en-US" smtClean="0"/>
               <a:pPr/>
-              <a:t>4/19/2026</a:t>
+              <a:t>4/22/2026</a:t>
             </a:fld>
             <a:endParaRPr lang="en-US"/>
           </a:p>
@@ -1088,7 +1068,7 @@
             <a:fld id="{1D8BD707-D9CF-40AE-B4C6-C98DA3205C09}" type="datetimeFigureOut">
               <a:rPr lang="en-US" smtClean="0"/>
               <a:pPr/>
-              <a:t>4/19/2026</a:t>
+              <a:t>4/22/2026</a:t>
             </a:fld>
             <a:endParaRPr lang="en-US"/>
           </a:p>
@@ -1370,7 +1350,7 @@
             <a:fld id="{1D8BD707-D9CF-40AE-B4C6-C98DA3205C09}" type="datetimeFigureOut">
               <a:rPr lang="en-US" smtClean="0"/>
               <a:pPr/>
-              <a:t>4/19/2026</a:t>
+              <a:t>4/22/2026</a:t>
             </a:fld>
             <a:endParaRPr lang="en-US"/>
           </a:p>
@@ -1786,7 +1766,7 @@
             <a:fld id="{1D8BD707-D9CF-40AE-B4C6-C98DA3205C09}" type="datetimeFigureOut">
               <a:rPr lang="en-US" smtClean="0"/>
               <a:pPr/>
-              <a:t>4/19/2026</a:t>
+              <a:t>4/22/2026</a:t>
             </a:fld>
             <a:endParaRPr lang="en-US"/>
           </a:p>
@@ -1900,7 +1880,7 @@
             <a:fld id="{1D8BD707-D9CF-40AE-B4C6-C98DA3205C09}" type="datetimeFigureOut">
               <a:rPr lang="en-US" smtClean="0"/>
               <a:pPr/>
-              <a:t>4/19/2026</a:t>
+              <a:t>4/22/2026</a:t>
             </a:fld>
             <a:endParaRPr lang="en-US"/>
           </a:p>
@@ -1992,7 +1972,7 @@
             <a:fld id="{1D8BD707-D9CF-40AE-B4C6-C98DA3205C09}" type="datetimeFigureOut">
               <a:rPr lang="en-US" smtClean="0"/>
               <a:pPr/>
-              <a:t>4/19/2026</a:t>
+              <a:t>4/22/2026</a:t>
             </a:fld>
             <a:endParaRPr lang="en-US"/>
           </a:p>
@@ -2264,7 +2244,7 @@
             <a:fld id="{1D8BD707-D9CF-40AE-B4C6-C98DA3205C09}" type="datetimeFigureOut">
               <a:rPr lang="en-US" smtClean="0"/>
               <a:pPr/>
-              <a:t>4/19/2026</a:t>
+              <a:t>4/22/2026</a:t>
             </a:fld>
             <a:endParaRPr lang="en-US"/>
           </a:p>
@@ -2513,7 +2493,7 @@
             <a:fld id="{1D8BD707-D9CF-40AE-B4C6-C98DA3205C09}" type="datetimeFigureOut">
               <a:rPr lang="en-US" smtClean="0"/>
               <a:pPr/>
-              <a:t>4/19/2026</a:t>
+              <a:t>4/22/2026</a:t>
             </a:fld>
             <a:endParaRPr lang="en-US"/>
           </a:p>
@@ -2721,7 +2701,7 @@
             <a:fld id="{1D8BD707-D9CF-40AE-B4C6-C98DA3205C09}" type="datetimeFigureOut">
               <a:rPr lang="en-US" smtClean="0"/>
               <a:pPr/>
-              <a:t>4/19/2026</a:t>
+              <a:t>4/22/2026</a:t>
             </a:fld>
             <a:endParaRPr lang="en-US"/>
           </a:p>
@@ -3119,18 +3099,6 @@
               </a:lnSpc>
             </a:pPr>
             <a:r>
-              <a:rPr lang="ru-RU" sz="4000" spc="300" dirty="0" smtClean="0">
-                <a:solidFill>
-                  <a:srgbClr val="000000"/>
-                </a:solidFill>
-                <a:latin typeface="Arial" panose="020B0604020202020204" pitchFamily="34" charset="0"/>
-                <a:ea typeface="League Spartan"/>
-                <a:cs typeface="Arial" panose="020B0604020202020204" pitchFamily="34" charset="0"/>
-                <a:sym typeface="League Spartan"/>
-              </a:rPr>
-              <a:t>ИНФРАСТРУКТУРА МИКРОСЕРВИСНОГО ПРИЛОЖЕНИЯ</a:t>
-            </a:r>
-            <a:r>
               <a:rPr lang="ru-RU" sz="4000" spc="300" dirty="0">
                 <a:solidFill>
                   <a:srgbClr val="000000"/>
@@ -3140,7 +3108,7 @@
                 <a:cs typeface="Arial" panose="020B0604020202020204" pitchFamily="34" charset="0"/>
                 <a:sym typeface="League Spartan"/>
               </a:rPr>
-              <a:t/>
+              <a:t>ИНФРАСТРУКТУРА МИКРОСЕРВИСНОГО ПРИЛОЖЕНИЯ</a:t>
             </a:r>
             <a:br>
               <a:rPr lang="ru-RU" sz="4000" spc="300" dirty="0">
@@ -3154,7 +3122,7 @@
               </a:rPr>
             </a:br>
             <a:r>
-              <a:rPr lang="ru-RU" sz="4000" spc="300" dirty="0" smtClean="0">
+              <a:rPr lang="ru-RU" sz="4000" spc="300" dirty="0">
                 <a:solidFill>
                   <a:srgbClr val="000000"/>
                 </a:solidFill>
@@ -3283,7 +3251,7 @@
               <a:t>. </a:t>
             </a:r>
             <a:r>
-              <a:rPr lang="ru-RU" sz="2000" spc="225" dirty="0" smtClean="0">
+              <a:rPr lang="ru-RU" sz="2000" spc="225" dirty="0">
                 <a:solidFill>
                   <a:srgbClr val="000000"/>
                 </a:solidFill>
@@ -3295,7 +3263,7 @@
               <a:t>2</a:t>
             </a:r>
             <a:r>
-              <a:rPr lang="en-US" sz="2000" spc="225" dirty="0" smtClean="0">
+              <a:rPr lang="en-US" sz="2000" spc="225" dirty="0">
                 <a:solidFill>
                   <a:srgbClr val="000000"/>
                 </a:solidFill>
@@ -3307,7 +3275,7 @@
               <a:t>5050</a:t>
             </a:r>
             <a:r>
-              <a:rPr lang="ru-RU" sz="2000" spc="225" dirty="0" smtClean="0">
+              <a:rPr lang="ru-RU" sz="2000" spc="225" dirty="0">
                 <a:solidFill>
                   <a:srgbClr val="000000"/>
                 </a:solidFill>
@@ -3338,7 +3306,7 @@
               </a:spcBef>
             </a:pPr>
             <a:r>
-              <a:rPr lang="ru-RU" sz="2000" spc="225" dirty="0" smtClean="0">
+              <a:rPr lang="ru-RU" sz="2000" spc="225" dirty="0">
                 <a:solidFill>
                   <a:srgbClr val="000000"/>
                 </a:solidFill>
@@ -3350,7 +3318,7 @@
               <a:t>Зинович</a:t>
             </a:r>
             <a:r>
-              <a:rPr lang="en-US" sz="2000" spc="225" dirty="0" smtClean="0">
+              <a:rPr lang="en-US" sz="2000" spc="225" dirty="0">
                 <a:solidFill>
                   <a:srgbClr val="000000"/>
                 </a:solidFill>
@@ -3362,7 +3330,7 @@
               <a:t> </a:t>
             </a:r>
             <a:r>
-              <a:rPr lang="ru-RU" sz="2000" spc="225" dirty="0" smtClean="0">
+              <a:rPr lang="ru-RU" sz="2000" spc="225" dirty="0">
                 <a:solidFill>
                   <a:srgbClr val="000000"/>
                 </a:solidFill>
@@ -3374,7 +3342,7 @@
               <a:t>И</a:t>
             </a:r>
             <a:r>
-              <a:rPr lang="en-US" sz="2000" spc="225" dirty="0" smtClean="0">
+              <a:rPr lang="en-US" sz="2000" spc="225" dirty="0">
                 <a:solidFill>
                   <a:srgbClr val="000000"/>
                 </a:solidFill>
@@ -3386,7 +3354,7 @@
               <a:t>.</a:t>
             </a:r>
             <a:r>
-              <a:rPr lang="ru-RU" sz="2000" spc="225" dirty="0" smtClean="0">
+              <a:rPr lang="ru-RU" sz="2000" spc="225" dirty="0">
                 <a:solidFill>
                   <a:srgbClr val="000000"/>
                 </a:solidFill>
@@ -3398,7 +3366,7 @@
               <a:t>В</a:t>
             </a:r>
             <a:r>
-              <a:rPr lang="en-US" sz="2000" spc="225" dirty="0" smtClean="0">
+              <a:rPr lang="en-US" sz="2000" spc="225" dirty="0">
                 <a:solidFill>
                   <a:srgbClr val="000000"/>
                 </a:solidFill>
@@ -3409,15 +3377,6 @@
               </a:rPr>
               <a:t>.</a:t>
             </a:r>
-            <a:endParaRPr lang="en-US" sz="2000" spc="225" dirty="0">
-              <a:solidFill>
-                <a:srgbClr val="000000"/>
-              </a:solidFill>
-              <a:latin typeface="Arial" panose="020B0604020202020204" pitchFamily="34" charset="0"/>
-              <a:ea typeface="Open Sans"/>
-              <a:cs typeface="Arial" panose="020B0604020202020204" pitchFamily="34" charset="0"/>
-              <a:sym typeface="Open Sans"/>
-            </a:endParaRPr>
           </a:p>
         </p:txBody>
       </p:sp>
@@ -3430,7 +3389,7 @@
         <p:spPr>
           <a:xfrm>
             <a:off x="10439400" y="7070956"/>
-            <a:ext cx="6334666" cy="1500411"/>
+            <a:ext cx="6334666" cy="1433790"/>
           </a:xfrm>
           <a:prstGeom prst="rect">
             <a:avLst/>
@@ -3491,31 +3450,7 @@
                 <a:cs typeface="Arial" panose="020B0604020202020204" pitchFamily="34" charset="0"/>
                 <a:sym typeface="Open Sans"/>
               </a:rPr>
-              <a:t>м</a:t>
-            </a:r>
-            <a:r>
-              <a:rPr lang="ru-RU" sz="2000" spc="225" dirty="0" smtClean="0">
-                <a:solidFill>
-                  <a:srgbClr val="000000"/>
-                </a:solidFill>
-                <a:latin typeface="Arial" panose="020B0604020202020204" pitchFamily="34" charset="0"/>
-                <a:ea typeface="Open Sans"/>
-                <a:cs typeface="Arial" panose="020B0604020202020204" pitchFamily="34" charset="0"/>
-                <a:sym typeface="Open Sans"/>
-              </a:rPr>
-              <a:t>агистр технических наук кафедры </a:t>
-            </a:r>
-            <a:r>
-              <a:rPr lang="ru-RU" sz="2000" spc="225" dirty="0">
-                <a:solidFill>
-                  <a:srgbClr val="000000"/>
-                </a:solidFill>
-                <a:latin typeface="Arial" panose="020B0604020202020204" pitchFamily="34" charset="0"/>
-                <a:ea typeface="Open Sans"/>
-                <a:cs typeface="Arial" panose="020B0604020202020204" pitchFamily="34" charset="0"/>
-                <a:sym typeface="Open Sans"/>
-              </a:rPr>
-              <a:t>ЭВМ</a:t>
+              <a:t>магистр, ассистент кафедры ЭВМ </a:t>
             </a:r>
           </a:p>
           <a:p>
@@ -3528,7 +3463,7 @@
               </a:spcBef>
             </a:pPr>
             <a:r>
-              <a:rPr lang="ru-RU" sz="2000" spc="225" dirty="0" smtClean="0">
+              <a:rPr lang="ru-RU" sz="2000" spc="225" dirty="0">
                 <a:solidFill>
                   <a:srgbClr val="000000"/>
                 </a:solidFill>
@@ -3540,7 +3475,7 @@
               <a:t>Скиба</a:t>
             </a:r>
             <a:r>
-              <a:rPr lang="en-US" sz="2000" spc="225" dirty="0" smtClean="0">
+              <a:rPr lang="en-US" sz="2000" spc="225" dirty="0">
                 <a:solidFill>
                   <a:srgbClr val="000000"/>
                 </a:solidFill>
@@ -3552,7 +3487,7 @@
               <a:t> </a:t>
             </a:r>
             <a:r>
-              <a:rPr lang="ru-RU" sz="2000" spc="225" dirty="0" smtClean="0">
+              <a:rPr lang="ru-RU" sz="2000" spc="225" dirty="0">
                 <a:solidFill>
                   <a:srgbClr val="000000"/>
                 </a:solidFill>
@@ -3564,7 +3499,7 @@
               <a:t>И</a:t>
             </a:r>
             <a:r>
-              <a:rPr lang="en-US" sz="2000" spc="225" dirty="0" smtClean="0">
+              <a:rPr lang="en-US" sz="2000" spc="225" dirty="0">
                 <a:solidFill>
                   <a:srgbClr val="000000"/>
                 </a:solidFill>
@@ -3576,7 +3511,7 @@
               <a:t>.</a:t>
             </a:r>
             <a:r>
-              <a:rPr lang="ru-RU" sz="2000" spc="225" dirty="0" smtClean="0">
+              <a:rPr lang="ru-RU" sz="2000" spc="225" dirty="0">
                 <a:solidFill>
                   <a:srgbClr val="000000"/>
                 </a:solidFill>
@@ -3588,7 +3523,7 @@
               <a:t>Г</a:t>
             </a:r>
             <a:r>
-              <a:rPr lang="en-US" sz="2000" spc="225" dirty="0" smtClean="0">
+              <a:rPr lang="en-US" sz="2000" spc="225" dirty="0">
                 <a:solidFill>
                   <a:srgbClr val="000000"/>
                 </a:solidFill>
@@ -3599,15 +3534,6 @@
               </a:rPr>
               <a:t>.</a:t>
             </a:r>
-            <a:endParaRPr lang="en-US" sz="2000" spc="225" dirty="0">
-              <a:solidFill>
-                <a:srgbClr val="000000"/>
-              </a:solidFill>
-              <a:latin typeface="Arial" panose="020B0604020202020204" pitchFamily="34" charset="0"/>
-              <a:ea typeface="Open Sans"/>
-              <a:cs typeface="Arial" panose="020B0604020202020204" pitchFamily="34" charset="0"/>
-              <a:sym typeface="Open Sans"/>
-            </a:endParaRPr>
           </a:p>
         </p:txBody>
       </p:sp>
@@ -3708,13 +3634,6 @@
       </p:transition>
     </mc:Fallback>
   </mc:AlternateContent>
-  <p:timing>
-    <p:tnLst>
-      <p:par>
-        <p:cTn id="1" dur="indefinite" restart="never" nodeType="tmRoot"/>
-      </p:par>
-    </p:tnLst>
-  </p:timing>
 </p:sld>
 </file>
 
@@ -3765,7 +3684,7 @@
               </a:spcBef>
             </a:pPr>
             <a:r>
-              <a:rPr lang="ru-RU" sz="2000" spc="674" dirty="0" smtClean="0">
+              <a:rPr lang="ru-RU" sz="2000" spc="674" dirty="0">
                 <a:solidFill>
                   <a:srgbClr val="000000"/>
                 </a:solidFill>
@@ -3817,18 +3736,11 @@
           <a:lstStyle/>
           <a:p>
             <a:r>
-              <a:rPr lang="ru-RU" sz="4000" dirty="0" smtClean="0">
-                <a:latin typeface="Arial" panose="020B0604020202020204" pitchFamily="34" charset="0"/>
-                <a:cs typeface="Arial" panose="020B0604020202020204" pitchFamily="34" charset="0"/>
-              </a:rPr>
-              <a:t>ЦЕЛЬ </a:t>
-            </a:r>
-            <a:r>
               <a:rPr lang="ru-RU" sz="4000" dirty="0">
                 <a:latin typeface="Arial" panose="020B0604020202020204" pitchFamily="34" charset="0"/>
                 <a:cs typeface="Arial" panose="020B0604020202020204" pitchFamily="34" charset="0"/>
               </a:rPr>
-              <a:t>И ЗАДАЧИ</a:t>
+              <a:t>ЦЕЛЬ И ЗАДАЧИ</a:t>
             </a:r>
           </a:p>
         </p:txBody>
@@ -3867,18 +3779,11 @@
               </a:lnSpc>
             </a:pPr>
             <a:r>
-              <a:rPr lang="ru-RU" sz="2000" dirty="0" smtClean="0">
-                <a:latin typeface="Arial" panose="020B0604020202020204" pitchFamily="34" charset="0"/>
-                <a:cs typeface="Arial" panose="020B0604020202020204" pitchFamily="34" charset="0"/>
-              </a:rPr>
-              <a:t>Разработка </a:t>
-            </a:r>
-            <a:r>
               <a:rPr lang="ru-RU" sz="2000" dirty="0">
                 <a:latin typeface="Arial" panose="020B0604020202020204" pitchFamily="34" charset="0"/>
                 <a:cs typeface="Arial" panose="020B0604020202020204" pitchFamily="34" charset="0"/>
               </a:rPr>
-              <a:t>и развертывание инфраструктуры для микросервисного приложения агрегатора такси с базовой бизнес-логикой, обеспечивающей масштабируемость, отказоустойчивость и эффективное взаимодействие микросервисов</a:t>
+              <a:t>Разработка и развертывание инфраструктуры для микросервисного приложения агрегатора такси с базовой бизнес-логикой, обеспечивающей масштабируемость, отказоустойчивость и эффективное взаимодействие микросервисов</a:t>
             </a:r>
           </a:p>
         </p:txBody>
@@ -3923,19 +3828,8 @@
                 <a:latin typeface="Arial" panose="020B0604020202020204" pitchFamily="34" charset="0"/>
                 <a:cs typeface="Arial" panose="020B0604020202020204" pitchFamily="34" charset="0"/>
               </a:rPr>
-              <a:t>анализ современных практик и паттернов построения микросервисных систем</a:t>
-            </a:r>
-            <a:r>
-              <a:rPr lang="ru-RU" sz="2000" dirty="0" smtClean="0">
-                <a:latin typeface="Arial" panose="020B0604020202020204" pitchFamily="34" charset="0"/>
-                <a:cs typeface="Arial" panose="020B0604020202020204" pitchFamily="34" charset="0"/>
-              </a:rPr>
-              <a:t>;</a:t>
-            </a:r>
-            <a:endParaRPr lang="ru-RU" sz="2000" dirty="0">
-              <a:latin typeface="Arial" panose="020B0604020202020204" pitchFamily="34" charset="0"/>
-              <a:cs typeface="Arial" panose="020B0604020202020204" pitchFamily="34" charset="0"/>
-            </a:endParaRPr>
+              <a:t>анализ современных практик и паттернов построения микросервисных систем;</a:t>
+            </a:r>
           </a:p>
           <a:p>
             <a:pPr marL="342900" indent="-342900">
@@ -3950,19 +3844,8 @@
                 <a:latin typeface="Arial" panose="020B0604020202020204" pitchFamily="34" charset="0"/>
                 <a:cs typeface="Arial" panose="020B0604020202020204" pitchFamily="34" charset="0"/>
               </a:rPr>
-              <a:t>проектирование и настройка центральных инфраструктурных </a:t>
-            </a:r>
-            <a:r>
-              <a:rPr lang="ru-RU" sz="2000" dirty="0" smtClean="0">
-                <a:latin typeface="Arial" panose="020B0604020202020204" pitchFamily="34" charset="0"/>
-                <a:cs typeface="Arial" panose="020B0604020202020204" pitchFamily="34" charset="0"/>
-              </a:rPr>
-              <a:t>компонентов;</a:t>
-            </a:r>
-            <a:endParaRPr lang="ru-RU" sz="2000" dirty="0">
-              <a:latin typeface="Arial" panose="020B0604020202020204" pitchFamily="34" charset="0"/>
-              <a:cs typeface="Arial" panose="020B0604020202020204" pitchFamily="34" charset="0"/>
-            </a:endParaRPr>
+              <a:t>проектирование и настройка центральных инфраструктурных компонентов;</a:t>
+            </a:r>
           </a:p>
           <a:p>
             <a:pPr marL="342900" indent="-342900">
@@ -3977,19 +3860,8 @@
                 <a:latin typeface="Arial" panose="020B0604020202020204" pitchFamily="34" charset="0"/>
                 <a:cs typeface="Arial" panose="020B0604020202020204" pitchFamily="34" charset="0"/>
               </a:rPr>
-              <a:t>организация системы единой авторизации и аутентификации</a:t>
-            </a:r>
-            <a:r>
-              <a:rPr lang="ru-RU" sz="2000" dirty="0" smtClean="0">
-                <a:latin typeface="Arial" panose="020B0604020202020204" pitchFamily="34" charset="0"/>
-                <a:cs typeface="Arial" panose="020B0604020202020204" pitchFamily="34" charset="0"/>
-              </a:rPr>
-              <a:t>;</a:t>
-            </a:r>
-            <a:endParaRPr lang="ru-RU" sz="2000" dirty="0">
-              <a:latin typeface="Arial" panose="020B0604020202020204" pitchFamily="34" charset="0"/>
-              <a:cs typeface="Arial" panose="020B0604020202020204" pitchFamily="34" charset="0"/>
-            </a:endParaRPr>
+              <a:t>организация системы единой авторизации и аутентификации;</a:t>
+            </a:r>
           </a:p>
           <a:p>
             <a:pPr marL="342900" indent="-342900">
@@ -4004,17 +3876,10 @@
                 <a:latin typeface="Arial" panose="020B0604020202020204" pitchFamily="34" charset="0"/>
                 <a:cs typeface="Arial" panose="020B0604020202020204" pitchFamily="34" charset="0"/>
               </a:rPr>
-              <a:t>выбор и настройка хранилищ </a:t>
-            </a:r>
-            <a:r>
-              <a:rPr lang="ru-RU" sz="2000" dirty="0" smtClean="0">
-                <a:latin typeface="Arial" panose="020B0604020202020204" pitchFamily="34" charset="0"/>
-                <a:cs typeface="Arial" panose="020B0604020202020204" pitchFamily="34" charset="0"/>
-              </a:rPr>
-              <a:t>данных</a:t>
-            </a:r>
-            <a:r>
-              <a:rPr lang="en-US" sz="2000" dirty="0" smtClean="0">
+              <a:t>выбор и настройка хранилищ данных</a:t>
+            </a:r>
+            <a:r>
+              <a:rPr lang="en-US" sz="2000" dirty="0">
                 <a:latin typeface="Arial" panose="020B0604020202020204" pitchFamily="34" charset="0"/>
                 <a:cs typeface="Arial" panose="020B0604020202020204" pitchFamily="34" charset="0"/>
               </a:rPr>
@@ -4034,16 +3899,9 @@
                 <a:latin typeface="Arial" panose="020B0604020202020204" pitchFamily="34" charset="0"/>
                 <a:cs typeface="Arial" panose="020B0604020202020204" pitchFamily="34" charset="0"/>
               </a:rPr>
-              <a:t>реализация асинхронного взаимодействия между микросервисами</a:t>
-            </a:r>
-            <a:r>
-              <a:rPr lang="ru-RU" sz="2000" dirty="0" smtClean="0">
-                <a:latin typeface="Arial" panose="020B0604020202020204" pitchFamily="34" charset="0"/>
-                <a:cs typeface="Arial" panose="020B0604020202020204" pitchFamily="34" charset="0"/>
-              </a:rPr>
-              <a:t>;</a:t>
-            </a:r>
-            <a:endParaRPr lang="en-US" sz="2000" dirty="0" smtClean="0">
+              <a:t>реализация асинхронного взаимодействия между микросервисами;</a:t>
+            </a:r>
+            <a:endParaRPr lang="en-US" sz="2000" dirty="0">
               <a:latin typeface="Arial" panose="020B0604020202020204" pitchFamily="34" charset="0"/>
               <a:cs typeface="Arial" panose="020B0604020202020204" pitchFamily="34" charset="0"/>
             </a:endParaRPr>
@@ -4061,16 +3919,9 @@
                 <a:latin typeface="Arial" panose="020B0604020202020204" pitchFamily="34" charset="0"/>
                 <a:cs typeface="Arial" panose="020B0604020202020204" pitchFamily="34" charset="0"/>
               </a:rPr>
-              <a:t>построение полноценной системы логирования и трассировки</a:t>
-            </a:r>
-            <a:r>
-              <a:rPr lang="ru-RU" sz="2000" dirty="0" smtClean="0">
-                <a:latin typeface="Arial" panose="020B0604020202020204" pitchFamily="34" charset="0"/>
-                <a:cs typeface="Arial" panose="020B0604020202020204" pitchFamily="34" charset="0"/>
-              </a:rPr>
-              <a:t>;</a:t>
-            </a:r>
-            <a:endParaRPr lang="en-US" sz="2000" dirty="0" smtClean="0">
+              <a:t>построение полноценной системы логирования и трассировки;</a:t>
+            </a:r>
+            <a:endParaRPr lang="en-US" sz="2000" dirty="0">
               <a:latin typeface="Arial" panose="020B0604020202020204" pitchFamily="34" charset="0"/>
               <a:cs typeface="Arial" panose="020B0604020202020204" pitchFamily="34" charset="0"/>
             </a:endParaRPr>
@@ -4088,17 +3939,10 @@
                 <a:latin typeface="Arial" panose="020B0604020202020204" pitchFamily="34" charset="0"/>
                 <a:cs typeface="Arial" panose="020B0604020202020204" pitchFamily="34" charset="0"/>
               </a:rPr>
-              <a:t>разработка и настройка базовых </a:t>
-            </a:r>
-            <a:r>
-              <a:rPr lang="ru-RU" sz="2000" dirty="0" smtClean="0">
-                <a:latin typeface="Arial" panose="020B0604020202020204" pitchFamily="34" charset="0"/>
-                <a:cs typeface="Arial" panose="020B0604020202020204" pitchFamily="34" charset="0"/>
-              </a:rPr>
-              <a:t>микросервисов</a:t>
-            </a:r>
-            <a:r>
-              <a:rPr lang="en-US" sz="2000" dirty="0" smtClean="0"/>
+              <a:t>разработка и настройка базовых микросервисов</a:t>
+            </a:r>
+            <a:r>
+              <a:rPr lang="en-US" sz="2000" dirty="0"/>
               <a:t>.</a:t>
             </a:r>
             <a:endParaRPr lang="ru-RU" sz="2000" dirty="0">
@@ -4592,16 +4436,12 @@
           <a:lstStyle/>
           <a:p>
             <a:r>
-              <a:rPr lang="ru-RU" sz="4000" dirty="0" smtClean="0">
+              <a:rPr lang="ru-RU" sz="4000" dirty="0">
                 <a:latin typeface="Arial" panose="020B0604020202020204" pitchFamily="34" charset="0"/>
                 <a:cs typeface="Arial" panose="020B0604020202020204" pitchFamily="34" charset="0"/>
               </a:rPr>
               <a:t>АРХИТЕКТУРА ИНФРАСТРУКТУРЫ</a:t>
             </a:r>
-            <a:endParaRPr lang="ru-RU" sz="4000" dirty="0">
-              <a:latin typeface="Arial" panose="020B0604020202020204" pitchFamily="34" charset="0"/>
-              <a:cs typeface="Arial" panose="020B0604020202020204" pitchFamily="34" charset="0"/>
-            </a:endParaRPr>
           </a:p>
         </p:txBody>
       </p:sp>
@@ -4686,13 +4526,6 @@
   <p:transition spd="slow">
     <p:push dir="u"/>
   </p:transition>
-  <p:timing>
-    <p:tnLst>
-      <p:par>
-        <p:cTn id="1" dur="indefinite" restart="never" nodeType="tmRoot"/>
-      </p:par>
-    </p:tnLst>
-  </p:timing>
 </p:sld>
 </file>
 
@@ -4795,18 +4628,11 @@
           <a:lstStyle/>
           <a:p>
             <a:r>
-              <a:rPr lang="ru-RU" sz="4000" dirty="0" smtClean="0">
-                <a:latin typeface="Arial" panose="020B0604020202020204" pitchFamily="34" charset="0"/>
-                <a:cs typeface="Arial" panose="020B0604020202020204" pitchFamily="34" charset="0"/>
-              </a:rPr>
-              <a:t>ИСПОЛЬЗУЕМЫЕ </a:t>
-            </a:r>
-            <a:r>
               <a:rPr lang="ru-RU" sz="4000" dirty="0">
                 <a:latin typeface="Arial" panose="020B0604020202020204" pitchFamily="34" charset="0"/>
                 <a:cs typeface="Arial" panose="020B0604020202020204" pitchFamily="34" charset="0"/>
               </a:rPr>
-              <a:t>ТЕХНОЛОГИИ</a:t>
+              <a:t>ИСПОЛЬЗУЕМЫЕ ТЕХНОЛОГИИ</a:t>
             </a:r>
           </a:p>
         </p:txBody>
@@ -5070,13 +4896,6 @@
   <p:transition spd="slow">
     <p:push dir="u"/>
   </p:transition>
-  <p:timing>
-    <p:tnLst>
-      <p:par>
-        <p:cTn id="1" dur="indefinite" restart="never" nodeType="tmRoot"/>
-      </p:par>
-    </p:tnLst>
-  </p:timing>
 </p:sld>
 </file>
 
@@ -5134,7 +4953,7 @@
           <a:lstStyle/>
           <a:p>
             <a:r>
-              <a:rPr lang="ru-RU" sz="4000" dirty="0" smtClean="0">
+              <a:rPr lang="ru-RU" sz="4000" dirty="0">
                 <a:solidFill>
                   <a:schemeClr val="bg1"/>
                 </a:solidFill>
@@ -5143,13 +4962,6 @@
               </a:rPr>
               <a:t>ДЕМОНСТРАЦИЯ РАБОТЫ ИНФРАСТРУКТУРЫ</a:t>
             </a:r>
-            <a:endParaRPr lang="ru-RU" sz="4000" dirty="0">
-              <a:solidFill>
-                <a:schemeClr val="bg1"/>
-              </a:solidFill>
-              <a:latin typeface="Arial" panose="020B0604020202020204" pitchFamily="34" charset="0"/>
-              <a:cs typeface="Arial" panose="020B0604020202020204" pitchFamily="34" charset="0"/>
-            </a:endParaRPr>
           </a:p>
         </p:txBody>
       </p:sp>
@@ -5255,13 +5067,6 @@
   <p:transition spd="slow">
     <p:cover/>
   </p:transition>
-  <p:timing>
-    <p:tnLst>
-      <p:par>
-        <p:cTn id="1" dur="indefinite" restart="never" nodeType="tmRoot"/>
-      </p:par>
-    </p:tnLst>
-  </p:timing>
 </p:sld>
 </file>
 
@@ -5409,18 +5214,11 @@
               <a:buChar char="-"/>
             </a:pPr>
             <a:r>
-              <a:rPr lang="ru-RU" sz="2000" dirty="0" smtClean="0">
-                <a:latin typeface="Arial" panose="020B0604020202020204" pitchFamily="34" charset="0"/>
-                <a:cs typeface="Arial" panose="020B0604020202020204" pitchFamily="34" charset="0"/>
-              </a:rPr>
-              <a:t>использование </a:t>
-            </a:r>
-            <a:r>
               <a:rPr lang="ru-RU" sz="2000" dirty="0">
                 <a:latin typeface="Arial" panose="020B0604020202020204" pitchFamily="34" charset="0"/>
                 <a:cs typeface="Arial" panose="020B0604020202020204" pitchFamily="34" charset="0"/>
               </a:rPr>
-              <a:t>оркестраторов: Kubernetes, Docker </a:t>
+              <a:t>использование оркестраторов: Kubernetes, Docker </a:t>
             </a:r>
             <a:r>
               <a:rPr lang="ru-RU" sz="2000" dirty="0" err="1">
@@ -5430,13 +5228,13 @@
               <a:t>Swarm</a:t>
             </a:r>
             <a:r>
-              <a:rPr lang="ru-RU" sz="2000" dirty="0" smtClean="0">
+              <a:rPr lang="ru-RU" sz="2000" dirty="0">
                 <a:latin typeface="Arial" panose="020B0604020202020204" pitchFamily="34" charset="0"/>
                 <a:cs typeface="Arial" panose="020B0604020202020204" pitchFamily="34" charset="0"/>
               </a:rPr>
               <a:t>;</a:t>
             </a:r>
-            <a:endParaRPr lang="en-US" sz="2000" dirty="0" smtClean="0">
+            <a:endParaRPr lang="en-US" sz="2000" dirty="0">
               <a:latin typeface="Arial" panose="020B0604020202020204" pitchFamily="34" charset="0"/>
               <a:cs typeface="Arial" panose="020B0604020202020204" pitchFamily="34" charset="0"/>
             </a:endParaRPr>
@@ -5454,16 +5252,9 @@
                 <a:latin typeface="Arial" panose="020B0604020202020204" pitchFamily="34" charset="0"/>
                 <a:cs typeface="Arial" panose="020B0604020202020204" pitchFamily="34" charset="0"/>
               </a:rPr>
-              <a:t>использование Yandex Cloud или AWS</a:t>
-            </a:r>
-            <a:r>
-              <a:rPr lang="ru-RU" sz="2000" dirty="0" smtClean="0">
-                <a:latin typeface="Arial" panose="020B0604020202020204" pitchFamily="34" charset="0"/>
-                <a:cs typeface="Arial" panose="020B0604020202020204" pitchFamily="34" charset="0"/>
-              </a:rPr>
-              <a:t>;</a:t>
-            </a:r>
-            <a:endParaRPr lang="en-US" sz="2000" dirty="0" smtClean="0">
+              <a:t>использование Yandex Cloud или AWS;</a:t>
+            </a:r>
+            <a:endParaRPr lang="en-US" sz="2000" dirty="0">
               <a:latin typeface="Arial" panose="020B0604020202020204" pitchFamily="34" charset="0"/>
               <a:cs typeface="Arial" panose="020B0604020202020204" pitchFamily="34" charset="0"/>
             </a:endParaRPr>
@@ -5477,7 +5268,7 @@
               <a:buChar char="-"/>
             </a:pPr>
             <a:r>
-              <a:rPr lang="ru-RU" sz="2000" dirty="0" smtClean="0">
+              <a:rPr lang="ru-RU" sz="2000" dirty="0">
                 <a:latin typeface="Arial" panose="020B0604020202020204" pitchFamily="34" charset="0"/>
                 <a:cs typeface="Arial" panose="020B0604020202020204" pitchFamily="34" charset="0"/>
               </a:rPr>
@@ -5502,14 +5293,7 @@
                 <a:latin typeface="Arial" panose="020B0604020202020204" pitchFamily="34" charset="0"/>
                 <a:cs typeface="Arial" panose="020B0604020202020204" pitchFamily="34" charset="0"/>
               </a:rPr>
-              <a:t>Kafka Connect</a:t>
-            </a:r>
-            <a:r>
-              <a:rPr lang="en-US" sz="2000" dirty="0" smtClean="0">
-                <a:latin typeface="Arial" panose="020B0604020202020204" pitchFamily="34" charset="0"/>
-                <a:cs typeface="Arial" panose="020B0604020202020204" pitchFamily="34" charset="0"/>
-              </a:rPr>
-              <a:t>;</a:t>
+              <a:t>Kafka Connect;</a:t>
             </a:r>
           </a:p>
           <a:p>
@@ -5577,23 +5361,12 @@
               <a:buChar char="-"/>
             </a:pPr>
             <a:r>
-              <a:rPr lang="ru-RU" sz="2000" dirty="0" smtClean="0">
-                <a:latin typeface="Arial" panose="020B0604020202020204" pitchFamily="34" charset="0"/>
-                <a:cs typeface="Arial" panose="020B0604020202020204" pitchFamily="34" charset="0"/>
-              </a:rPr>
-              <a:t>UI </a:t>
-            </a:r>
-            <a:r>
               <a:rPr lang="ru-RU" sz="2000" dirty="0">
                 <a:latin typeface="Arial" panose="020B0604020202020204" pitchFamily="34" charset="0"/>
                 <a:cs typeface="Arial" panose="020B0604020202020204" pitchFamily="34" charset="0"/>
               </a:rPr>
-              <a:t>для мониторинга логирования и трассировки; </a:t>
-            </a:r>
-            <a:endParaRPr lang="ru-RU" sz="2000" dirty="0" smtClean="0">
-              <a:latin typeface="Arial" panose="020B0604020202020204" pitchFamily="34" charset="0"/>
-              <a:cs typeface="Arial" panose="020B0604020202020204" pitchFamily="34" charset="0"/>
-            </a:endParaRPr>
+              <a:t>UI для мониторинга логирования и трассировки; </a:t>
+            </a:r>
           </a:p>
           <a:p>
             <a:pPr marL="342900" indent="-342900">
@@ -5610,10 +5383,6 @@
               </a:rPr>
               <a:t>UI для мониторинга компонентов: Kafka, Keycloak; </a:t>
             </a:r>
-            <a:endParaRPr lang="ru-RU" sz="2000" dirty="0" smtClean="0">
-              <a:latin typeface="Arial" panose="020B0604020202020204" pitchFamily="34" charset="0"/>
-              <a:cs typeface="Arial" panose="020B0604020202020204" pitchFamily="34" charset="0"/>
-            </a:endParaRPr>
           </a:p>
           <a:p>
             <a:pPr marL="342900" indent="-342900">
@@ -5628,14 +5397,7 @@
                 <a:latin typeface="Arial" panose="020B0604020202020204" pitchFamily="34" charset="0"/>
                 <a:cs typeface="Arial" panose="020B0604020202020204" pitchFamily="34" charset="0"/>
               </a:rPr>
-              <a:t>SSO для аутентификации и авторизации</a:t>
-            </a:r>
-            <a:r>
-              <a:rPr lang="ru-RU" sz="2000" dirty="0" smtClean="0">
-                <a:latin typeface="Arial" panose="020B0604020202020204" pitchFamily="34" charset="0"/>
-                <a:cs typeface="Arial" panose="020B0604020202020204" pitchFamily="34" charset="0"/>
-              </a:rPr>
-              <a:t>;</a:t>
+              <a:t>SSO для аутентификации и авторизации;</a:t>
             </a:r>
           </a:p>
           <a:p>
@@ -5651,14 +5413,7 @@
                 <a:latin typeface="Arial" panose="020B0604020202020204" pitchFamily="34" charset="0"/>
                 <a:cs typeface="Arial" panose="020B0604020202020204" pitchFamily="34" charset="0"/>
               </a:rPr>
-              <a:t>Базовые микросервисы</a:t>
-            </a:r>
-            <a:r>
-              <a:rPr lang="ru-RU" sz="2000" dirty="0" smtClean="0">
-                <a:latin typeface="Arial" panose="020B0604020202020204" pitchFamily="34" charset="0"/>
-                <a:cs typeface="Arial" panose="020B0604020202020204" pitchFamily="34" charset="0"/>
-              </a:rPr>
-              <a:t>;</a:t>
+              <a:t>Базовые микросервисы;</a:t>
             </a:r>
           </a:p>
           <a:p>
@@ -5780,7 +5535,7 @@
           <a:p>
             <a:pPr marR="0" algn="l" rtl="0"/>
             <a:r>
-              <a:rPr lang="ru-RU" sz="2000" b="1" u="sng" dirty="0" smtClean="0">
+              <a:rPr lang="ru-RU" sz="2000" b="1" u="sng" dirty="0">
                 <a:solidFill>
                   <a:srgbClr val="000000"/>
                 </a:solidFill>
@@ -5883,13 +5638,6 @@
   <p:transition spd="slow">
     <p:push dir="u"/>
   </p:transition>
-  <p:timing>
-    <p:tnLst>
-      <p:par>
-        <p:cTn id="1" dur="indefinite" restart="never" nodeType="tmRoot"/>
-      </p:par>
-    </p:tnLst>
-  </p:timing>
 </p:sld>
 </file>
 
@@ -6021,16 +5769,12 @@
           <a:lstStyle/>
           <a:p>
             <a:r>
-              <a:rPr lang="ru-RU" sz="4000" dirty="0" smtClean="0">
+              <a:rPr lang="ru-RU" sz="4000" dirty="0">
                 <a:latin typeface="Arial" panose="020B0604020202020204" pitchFamily="34" charset="0"/>
                 <a:cs typeface="Arial" panose="020B0604020202020204" pitchFamily="34" charset="0"/>
               </a:rPr>
               <a:t>СПАСИБО</a:t>
             </a:r>
-            <a:endParaRPr lang="ru-RU" sz="4000" dirty="0">
-              <a:latin typeface="Arial" panose="020B0604020202020204" pitchFamily="34" charset="0"/>
-              <a:cs typeface="Arial" panose="020B0604020202020204" pitchFamily="34" charset="0"/>
-            </a:endParaRPr>
           </a:p>
         </p:txBody>
       </p:sp>
@@ -6056,16 +5800,12 @@
           <a:lstStyle/>
           <a:p>
             <a:r>
-              <a:rPr lang="ru-RU" sz="3000" dirty="0" smtClean="0">
+              <a:rPr lang="ru-RU" sz="3000" dirty="0">
                 <a:latin typeface="Arial" panose="020B0604020202020204" pitchFamily="34" charset="0"/>
                 <a:cs typeface="Arial" panose="020B0604020202020204" pitchFamily="34" charset="0"/>
               </a:rPr>
               <a:t>ЗА ВНИМАНИЕ</a:t>
             </a:r>
-            <a:endParaRPr lang="ru-RU" sz="3000" dirty="0">
-              <a:latin typeface="Arial" panose="020B0604020202020204" pitchFamily="34" charset="0"/>
-              <a:cs typeface="Arial" panose="020B0604020202020204" pitchFamily="34" charset="0"/>
-            </a:endParaRPr>
           </a:p>
         </p:txBody>
       </p:sp>
@@ -6077,13 +5817,6 @@
   <p:transition spd="slow">
     <p:push dir="u"/>
   </p:transition>
-  <p:timing>
-    <p:tnLst>
-      <p:par>
-        <p:cTn id="1" dur="indefinite" restart="never" nodeType="tmRoot"/>
-      </p:par>
-    </p:tnLst>
-  </p:timing>
 </p:sld>
 </file>
 
